--- a/python_pptx/ffb1.pptx
+++ b/python_pptx/ffb1.pptx
@@ -6,6 +6,7 @@
   </p:sldMasterIdLst>
   <p:sldIdLst>
     <p:sldId id="256" r:id="rId7"/>
+    <p:sldId id="257" r:id="rId8"/>
   </p:sldIdLst>
   <p:sldSz cx="9144000" cy="6858000" type="screen4x3"/>
   <p:notesSz cx="6858000" cy="9144000"/>
@@ -3090,7 +3091,318 @@
       <p:grpSpPr/>
       <p:sp>
         <p:nvSpPr>
-          <p:cNvPr id="2" name="Rectangle 1"/>
+          <p:cNvPr id="2" name="TextBox 1"/>
+          <p:cNvSpPr txBox="1"/>
+          <p:nvPr/>
+        </p:nvSpPr>
+        <p:spPr>
+          <a:xfrm>
+            <a:off x="457200" y="274320"/>
+            <a:ext cx="3657600" cy="457200"/>
+          </a:xfrm>
+          <a:prstGeom prst="rect">
+            <a:avLst/>
+          </a:prstGeom>
+          <a:noFill/>
+        </p:spPr>
+        <p:txBody>
+          <a:bodyPr wrap="none">
+            <a:spAutoFit/>
+          </a:bodyPr>
+          <a:lstStyle/>
+          <a:p>
+            <a:r>
+              <a:t>見出し</a:t>
+            </a:r>
+          </a:p>
+        </p:txBody>
+      </p:sp>
+      <p:sp>
+        <p:nvSpPr>
+          <p:cNvPr id="3" name="TextBox 2"/>
+          <p:cNvSpPr txBox="1"/>
+          <p:nvPr/>
+        </p:nvSpPr>
+        <p:spPr>
+          <a:xfrm>
+            <a:off x="360000" y="720000"/>
+            <a:ext cx="1800000" cy="2880000"/>
+          </a:xfrm>
+          <a:prstGeom prst="rect">
+            <a:avLst/>
+          </a:prstGeom>
+          <a:noFill/>
+        </p:spPr>
+        <p:txBody>
+          <a:bodyPr wrap="none">
+            <a:spAutoFit/>
+          </a:bodyPr>
+          <a:lstStyle/>
+          <a:p>
+            <a:r>
+              <a:rPr>
+                <a:solidFill>
+                  <a:srgbClr val="0000FF"/>
+                </a:solidFill>
+              </a:rPr>
+              <a:t>いろいろ</a:t>
+            </a:r>
+          </a:p>
+        </p:txBody>
+      </p:sp>
+      <p:sp>
+        <p:nvSpPr>
+          <p:cNvPr id="4" name="Rectangle 3"/>
+          <p:cNvSpPr/>
+          <p:nvPr/>
+        </p:nvSpPr>
+        <p:spPr>
+          <a:xfrm>
+            <a:off x="720000" y="1440000"/>
+            <a:ext cx="1080000" cy="1080000"/>
+          </a:xfrm>
+          <a:prstGeom prst="rect">
+            <a:avLst/>
+          </a:prstGeom>
+        </p:spPr>
+        <p:style>
+          <a:lnRef idx="1">
+            <a:schemeClr val="accent1"/>
+          </a:lnRef>
+          <a:fillRef idx="3">
+            <a:schemeClr val="accent1"/>
+          </a:fillRef>
+          <a:effectRef idx="2">
+            <a:schemeClr val="accent1"/>
+          </a:effectRef>
+          <a:fontRef idx="minor">
+            <a:schemeClr val="lt1"/>
+          </a:fontRef>
+        </p:style>
+        <p:txBody>
+          <a:bodyPr rtlCol="0" anchor="ctr"/>
+          <a:lstStyle/>
+          <a:p>
+            <a:pPr algn="ctr"/>
+          </a:p>
+        </p:txBody>
+      </p:sp>
+      <p:sp>
+        <p:nvSpPr>
+          <p:cNvPr id="5" name="Straight Connector 4"/>
+          <p:cNvSpPr/>
+          <p:nvPr/>
+        </p:nvSpPr>
+        <p:spPr>
+          <a:xfrm>
+            <a:off x="1800000" y="1800000"/>
+            <a:ext cx="1800000" cy="1800000"/>
+          </a:xfrm>
+          <a:prstGeom prst="lineInv">
+            <a:avLst/>
+          </a:prstGeom>
+        </p:spPr>
+        <p:style>
+          <a:lnRef idx="1">
+            <a:schemeClr val="accent1"/>
+          </a:lnRef>
+          <a:fillRef idx="3">
+            <a:schemeClr val="accent1"/>
+          </a:fillRef>
+          <a:effectRef idx="2">
+            <a:schemeClr val="accent1"/>
+          </a:effectRef>
+          <a:fontRef idx="minor">
+            <a:schemeClr val="lt1"/>
+          </a:fontRef>
+        </p:style>
+        <p:txBody>
+          <a:bodyPr rtlCol="0" anchor="ctr"/>
+          <a:lstStyle/>
+          <a:p>
+            <a:pPr algn="ctr"/>
+          </a:p>
+        </p:txBody>
+      </p:sp>
+      <p:sp>
+        <p:nvSpPr>
+          <p:cNvPr id="6" name="Freeform 5"/>
+          <p:cNvSpPr/>
+          <p:nvPr/>
+        </p:nvSpPr>
+        <p:spPr>
+          <a:xfrm>
+            <a:off x="3240000" y="3240000"/>
+            <a:ext cx="360000" cy="360000"/>
+          </a:xfrm>
+          <a:custGeom>
+            <a:avLst/>
+            <a:gdLst/>
+            <a:ahLst/>
+            <a:cxnLst/>
+            <a:rect l="l" t="t" r="r" b="b"/>
+            <a:pathLst>
+              <a:path w="360000" h="360000">
+                <a:moveTo>
+                  <a:pt x="360000" y="360000"/>
+                </a:moveTo>
+                <a:lnTo>
+                  <a:pt x="360000" y="360000"/>
+                </a:lnTo>
+                <a:lnTo>
+                  <a:pt x="0" y="360000"/>
+                </a:lnTo>
+                <a:lnTo>
+                  <a:pt x="180000" y="0"/>
+                </a:lnTo>
+                <a:close/>
+              </a:path>
+            </a:pathLst>
+          </a:custGeom>
+        </p:spPr>
+        <p:style>
+          <a:lnRef idx="1">
+            <a:schemeClr val="accent1"/>
+          </a:lnRef>
+          <a:fillRef idx="3">
+            <a:schemeClr val="accent1"/>
+          </a:fillRef>
+          <a:effectRef idx="2">
+            <a:schemeClr val="accent1"/>
+          </a:effectRef>
+          <a:fontRef idx="minor">
+            <a:schemeClr val="lt1"/>
+          </a:fontRef>
+        </p:style>
+        <p:txBody>
+          <a:bodyPr rtlCol="0" anchor="ctr"/>
+          <a:lstStyle/>
+          <a:p>
+            <a:pPr algn="ctr"/>
+          </a:p>
+        </p:txBody>
+      </p:sp>
+      <p:sp>
+        <p:nvSpPr>
+          <p:cNvPr id="7" name="Rectangle 6"/>
+          <p:cNvSpPr/>
+          <p:nvPr/>
+        </p:nvSpPr>
+        <p:spPr>
+          <a:xfrm>
+            <a:off x="1080000" y="4320000"/>
+            <a:ext cx="720000" cy="720000"/>
+          </a:xfrm>
+          <a:prstGeom prst="rect">
+            <a:avLst/>
+          </a:prstGeom>
+        </p:spPr>
+        <p:style>
+          <a:lnRef idx="1">
+            <a:schemeClr val="accent1"/>
+          </a:lnRef>
+          <a:fillRef idx="3">
+            <a:schemeClr val="accent1"/>
+          </a:fillRef>
+          <a:effectRef idx="2">
+            <a:schemeClr val="accent1"/>
+          </a:effectRef>
+          <a:fontRef idx="minor">
+            <a:schemeClr val="lt1"/>
+          </a:fontRef>
+        </p:style>
+        <p:txBody>
+          <a:bodyPr rtlCol="0" anchor="ctr"/>
+          <a:lstStyle/>
+          <a:p>
+            <a:pPr algn="ctr"/>
+            <a:r>
+              <a:t>A</a:t>
+            </a:r>
+          </a:p>
+        </p:txBody>
+      </p:sp>
+      <p:sp>
+        <p:nvSpPr>
+          <p:cNvPr id="8" name="Rectangle 7"/>
+          <p:cNvSpPr/>
+          <p:nvPr/>
+        </p:nvSpPr>
+        <p:spPr>
+          <a:xfrm>
+            <a:off x="3960000" y="3600000"/>
+            <a:ext cx="720000" cy="720000"/>
+          </a:xfrm>
+          <a:prstGeom prst="rect">
+            <a:avLst/>
+          </a:prstGeom>
+        </p:spPr>
+        <p:style>
+          <a:lnRef idx="1">
+            <a:schemeClr val="accent1"/>
+          </a:lnRef>
+          <a:fillRef idx="3">
+            <a:schemeClr val="accent1"/>
+          </a:fillRef>
+          <a:effectRef idx="2">
+            <a:schemeClr val="accent1"/>
+          </a:effectRef>
+          <a:fontRef idx="minor">
+            <a:schemeClr val="lt1"/>
+          </a:fontRef>
+        </p:style>
+        <p:txBody>
+          <a:bodyPr rtlCol="0" anchor="ctr"/>
+          <a:lstStyle/>
+          <a:p>
+            <a:pPr algn="ctr"/>
+            <a:r>
+              <a:t>B</a:t>
+            </a:r>
+          </a:p>
+        </p:txBody>
+      </p:sp>
+      <p:cxnSp>
+        <p:nvCxnSpPr>
+          <p:cNvPr id="9" name="Connector 8"/>
+          <p:cNvCxnSpPr>
+            <a:stCxn id="7" idx="3"/>
+            <a:endCxn id="8" idx="1"/>
+          </p:cNvCxnSpPr>
+          <p:nvPr/>
+        </p:nvCxnSpPr>
+        <p:spPr>
+          <a:xfrm flipV="1">
+            <a:off x="1800000" y="3960000"/>
+            <a:ext cx="2160000" cy="720000"/>
+          </a:xfrm>
+          <a:prstGeom prst="bentConnector3">
+            <a:avLst/>
+          </a:prstGeom>
+          <a:ln>
+            <a:solidFill>
+              <a:srgbClr val="80FF00"/>
+            </a:solidFill>
+          </a:ln>
+        </p:spPr>
+        <p:style>
+          <a:lnRef idx="2">
+            <a:schemeClr val="accent1"/>
+          </a:lnRef>
+          <a:fillRef idx="0">
+            <a:schemeClr val="accent1"/>
+          </a:fillRef>
+          <a:effectRef idx="1">
+            <a:schemeClr val="accent1"/>
+          </a:effectRef>
+          <a:fontRef idx="minor">
+            <a:schemeClr val="tx1"/>
+          </a:fontRef>
+        </p:style>
+      </p:cxnSp>
+      <p:sp>
+        <p:nvSpPr>
+          <p:cNvPr id="10" name="Rectangle 9"/>
           <p:cNvSpPr/>
           <p:nvPr/>
         </p:nvSpPr>
@@ -3130,7 +3442,7 @@
       </p:sp>
       <p:sp>
         <p:nvSpPr>
-          <p:cNvPr id="3" name="Rectangle 2"/>
+          <p:cNvPr id="11" name="Rectangle 10"/>
           <p:cNvSpPr/>
           <p:nvPr/>
         </p:nvSpPr>
@@ -3170,10 +3482,10 @@
       </p:sp>
       <p:cxnSp>
         <p:nvCxnSpPr>
-          <p:cNvPr id="4" name="Connector 3"/>
+          <p:cNvPr id="12" name="Connector 11"/>
           <p:cNvCxnSpPr>
-            <a:stCxn id="2" idx="3"/>
-            <a:endCxn id="3" idx="2"/>
+            <a:stCxn id="10" idx="3"/>
+            <a:endCxn id="11" idx="2"/>
           </p:cNvCxnSpPr>
           <p:nvPr/>
         </p:nvCxnSpPr>
@@ -3183,9 +3495,7 @@
             <a:ext cx="2520000" cy="360000"/>
           </a:xfrm>
           <a:prstGeom prst="bentConnector3">
-            <a:avLst>
-              <a:gd name="adj1" fmla="val -635"/>
-            </a:avLst>
+            <a:avLst/>
           </a:prstGeom>
           <a:ln>
             <a:solidFill>
@@ -3210,7 +3520,7 @@
       </p:cxnSp>
       <p:sp>
         <p:nvSpPr>
-          <p:cNvPr id="5" name="Rectangle 4"/>
+          <p:cNvPr id="13" name="Rectangle 12"/>
           <p:cNvSpPr/>
           <p:nvPr/>
         </p:nvSpPr>
@@ -3250,13 +3560,13 @@
       </p:sp>
       <p:sp>
         <p:nvSpPr>
-          <p:cNvPr id="6" name="Rectangle 5"/>
+          <p:cNvPr id="14" name="Rectangle 13"/>
           <p:cNvSpPr/>
           <p:nvPr/>
         </p:nvSpPr>
         <p:spPr>
           <a:xfrm>
-            <a:off x="7920000" y="6120000"/>
+            <a:off x="7920000" y="2520000"/>
             <a:ext cx="720000" cy="720000"/>
           </a:xfrm>
           <a:prstGeom prst="rect">
@@ -3290,22 +3600,20 @@
       </p:sp>
       <p:cxnSp>
         <p:nvCxnSpPr>
-          <p:cNvPr id="7" name="Connector 6"/>
+          <p:cNvPr id="15" name="Connector 14"/>
           <p:cNvCxnSpPr>
-            <a:stCxn id="5" idx="0"/>
-            <a:endCxn id="6" idx="0"/>
+            <a:stCxn id="13" idx="0"/>
+            <a:endCxn id="14" idx="0"/>
           </p:cNvCxnSpPr>
           <p:nvPr/>
         </p:nvCxnSpPr>
         <p:spPr>
-          <a:xfrm rot="0">
-            <a:off x="5400000" y="5400000"/>
-            <a:ext cx="2880000" cy="720000"/>
+          <a:xfrm flipV="1">
+            <a:off x="5400000" y="2520000"/>
+            <a:ext cx="2880000" cy="2880000"/>
           </a:xfrm>
           <a:prstGeom prst="bentConnector3">
-            <a:avLst>
-              <a:gd name="adj1" fmla="val 0"/>
-            </a:avLst>
+            <a:avLst/>
           </a:prstGeom>
           <a:ln>
             <a:solidFill>
@@ -3328,6 +3636,116 @@
           </a:fontRef>
         </p:style>
       </p:cxnSp>
+    </p:spTree>
+  </p:cSld>
+  <p:clrMapOvr>
+    <a:masterClrMapping/>
+  </p:clrMapOvr>
+</p:sld>
+</file>
+
+<file path=ppt/slides/slide2.xml><?xml version="1.0" encoding="utf-8"?>
+<p:sld xmlns:a="http://schemas.openxmlformats.org/drawingml/2006/main" xmlns:p="http://schemas.openxmlformats.org/presentationml/2006/main" xmlns:r="http://schemas.openxmlformats.org/officeDocument/2006/relationships">
+  <p:cSld>
+    <p:spTree>
+      <p:nvGrpSpPr>
+        <p:cNvPr id="1" name=""/>
+        <p:cNvGrpSpPr/>
+        <p:nvPr/>
+      </p:nvGrpSpPr>
+      <p:grpSpPr/>
+      <p:sp>
+        <p:nvSpPr>
+          <p:cNvPr id="2" name="Rounded Rectangle 1"/>
+          <p:cNvSpPr/>
+          <p:nvPr/>
+        </p:nvSpPr>
+        <p:spPr>
+          <a:xfrm>
+            <a:off x="914400" y="914400"/>
+            <a:ext cx="914400" cy="914400"/>
+          </a:xfrm>
+          <a:prstGeom prst="roundRect">
+            <a:avLst/>
+          </a:prstGeom>
+          <a:solidFill>
+            <a:srgbClr val="197DFF"/>
+          </a:solidFill>
+          <a:ln w="31750">
+            <a:solidFill>
+              <a:srgbClr val="FF0000">
+                <a:lumMod val="50000"/>
+                <a:lumOff val="50000"/>
+              </a:srgbClr>
+            </a:solidFill>
+          </a:ln>
+        </p:spPr>
+        <p:style>
+          <a:lnRef idx="1">
+            <a:schemeClr val="accent1"/>
+          </a:lnRef>
+          <a:fillRef idx="3">
+            <a:schemeClr val="accent1"/>
+          </a:fillRef>
+          <a:effectRef idx="2">
+            <a:schemeClr val="accent1"/>
+          </a:effectRef>
+          <a:fontRef idx="minor">
+            <a:schemeClr val="lt1"/>
+          </a:fontRef>
+        </p:style>
+        <p:txBody>
+          <a:bodyPr rtlCol="0" anchor="ctr"/>
+          <a:lstStyle/>
+          <a:p>
+            <a:pPr algn="ctr"/>
+          </a:p>
+        </p:txBody>
+      </p:sp>
+      <p:sp>
+        <p:nvSpPr>
+          <p:cNvPr id="3" name="Line Callout 2 (Accent Bar) 2"/>
+          <p:cNvSpPr/>
+          <p:nvPr/>
+        </p:nvSpPr>
+        <p:spPr>
+          <a:xfrm rot="18900000">
+            <a:off x="1800000" y="1800000"/>
+            <a:ext cx="720000" cy="720000"/>
+          </a:xfrm>
+          <a:prstGeom prst="accentCallout2">
+            <a:avLst>
+              <a:gd name="adj1" fmla="val 50000"/>
+              <a:gd name="adj2" fmla="val 0"/>
+              <a:gd name="adj3" fmla="val 50000"/>
+              <a:gd name="adj4" fmla="val -10000"/>
+              <a:gd name="adj5" fmla="val 300000"/>
+              <a:gd name="adj6" fmla="val -260000"/>
+            </a:avLst>
+          </a:prstGeom>
+        </p:spPr>
+        <p:style>
+          <a:lnRef idx="1">
+            <a:schemeClr val="accent1"/>
+          </a:lnRef>
+          <a:fillRef idx="3">
+            <a:schemeClr val="accent1"/>
+          </a:fillRef>
+          <a:effectRef idx="2">
+            <a:schemeClr val="accent1"/>
+          </a:effectRef>
+          <a:fontRef idx="minor">
+            <a:schemeClr val="lt1"/>
+          </a:fontRef>
+        </p:style>
+        <p:txBody>
+          <a:bodyPr rtlCol="0" anchor="ctr"/>
+          <a:lstStyle/>
+          <a:p>
+            <a:pPr algn="ctr"/>
+          </a:p>
+        </p:txBody>
+      </p:sp>
     </p:spTree>
   </p:cSld>
   <p:clrMapOvr>
